--- a/assets/pptx/catalog-530.pptx
+++ b/assets/pptx/catalog-530.pptx
@@ -3303,7 +3303,7 @@
                 <a:ea typeface="Ebrima"/>
                 <a:cs typeface="Ebrima"/>
               </a:rPr>
-              <a:t>በአንደበቱ ክብርን ይሰጥሃል (2x)</a:t>
+              <a:t>በአንደበቱ ክብርን ይሰጥሃል 2x</a:t>
             </a:r>
           </a:p>
         </p:txBody>
@@ -3370,7 +3370,7 @@
                 <a:ea typeface="Ebrima"/>
                 <a:cs typeface="Ebrima"/>
               </a:rPr>
-              <a:t>አዝ ሃሌሉያ (8x)</a:t>
+              <a:t>አዝ ሃሌሉያ 8x</a:t>
             </a:r>
           </a:p>
         </p:txBody>
@@ -3558,7 +3558,7 @@
                 <a:ea typeface="Ebrima"/>
                 <a:cs typeface="Ebrima"/>
               </a:rPr>
-              <a:t>አዝ ሃሌሉያ (8x)</a:t>
+              <a:t>አዝ ሃሌሉያ 8x</a:t>
             </a:r>
           </a:p>
         </p:txBody>
@@ -3679,7 +3679,7 @@
                 <a:ea typeface="Ebrima"/>
                 <a:cs typeface="Ebrima"/>
               </a:rPr>
-              <a:t>እኔ የእግዚአብሔር ነኝ እወቁት እላለሁ (2x)</a:t>
+              <a:t>እኔ የእግዚአብሔር ነኝ እወቁት እላለሁ 2x</a:t>
             </a:r>
           </a:p>
         </p:txBody>
@@ -3746,7 +3746,7 @@
                 <a:ea typeface="Ebrima"/>
                 <a:cs typeface="Ebrima"/>
               </a:rPr>
-              <a:t>አዝ ሃሌሉያ (8x)</a:t>
+              <a:t>አዝ ሃሌሉያ 8x</a:t>
             </a:r>
           </a:p>
         </p:txBody>
@@ -3867,7 +3867,7 @@
                 <a:ea typeface="Ebrima"/>
                 <a:cs typeface="Ebrima"/>
               </a:rPr>
-              <a:t>በአንደበቱ ክብርን ይሰጥሃል (2x)</a:t>
+              <a:t>በአንደበቱ ክብርን ይሰጥሃል 2x</a:t>
             </a:r>
           </a:p>
         </p:txBody>
@@ -3988,7 +3988,7 @@
                 <a:ea typeface="Ebrima"/>
                 <a:cs typeface="Ebrima"/>
               </a:rPr>
-              <a:t>እኔ የእግዚአብሔር ነኝ እወቁት እላለሁ (2x)</a:t>
+              <a:t>እኔ የእግዚአብሔር ነኝ እወቁት እላለሁ 2x</a:t>
             </a:r>
           </a:p>
         </p:txBody>
@@ -4055,7 +4055,7 @@
                 <a:ea typeface="Ebrima"/>
                 <a:cs typeface="Ebrima"/>
               </a:rPr>
-              <a:t>አዝ ሃሌሉያ (8x)</a:t>
+              <a:t>አዝ ሃሌሉያ 8x</a:t>
             </a:r>
           </a:p>
         </p:txBody>
